--- a/ppt/Phase_5_이미지처리_기본기.pptx
+++ b/ppt/Phase_5_이미지처리_기본기.pptx
@@ -17,9 +17,10 @@
     <p:sldId id="265" r:id="rId11"/>
     <p:sldId id="266" r:id="rId12"/>
     <p:sldId id="267" r:id="rId13"/>
+    <p:sldId id="268" r:id="rId14"/>
   </p:sldIdLst>
   <p:notesMasterIdLst>
-    <p:notesMasterId r:id="rId14"/>
+    <p:notesMasterId r:id="rId15"/>
   </p:notesMasterIdLst>
   <p:sldSz cx="9144000" cy="5143500"/>
   <p:notesSz cx="5143500" cy="9144000"/>
@@ -801,6 +802,94 @@
             <a:fld id="{F7021451-1387-4CA6-816F-3879F97B5CBC}" type="slidenum">
               <a:rPr lang="en-US"/>
               <a:t>12</a:t>
+            </a:fld>
+            <a:endParaRPr lang="en-US"/>
+          </a:p>
+        </p:txBody>
+      </p:sp>
+    </p:spTree>
+    <p:extLst>
+      <p:ext uri="{BB962C8B-B14F-4D97-AF65-F5344CB8AC3E}">
+        <p14:creationId xmlns:p14="http://schemas.microsoft.com/office/powerpoint/2010/main" val="1024086991"/>
+      </p:ext>
+    </p:extLst>
+  </p:cSld>
+  <p:clrMapOvr>
+    <a:masterClrMapping/>
+  </p:clrMapOvr>
+</p:notes>
+</file>
+
+<file path=ppt/notesSlides/notesSlide13.xml><?xml version="1.0" encoding="utf-8"?>
+<p:notes xmlns:a="http://schemas.openxmlformats.org/drawingml/2006/main" xmlns:r="http://schemas.openxmlformats.org/officeDocument/2006/relationships" xmlns:p="http://schemas.openxmlformats.org/presentationml/2006/main">
+  <p:cSld>
+    <p:spTree>
+      <p:nvGrpSpPr>
+        <p:cNvPr id="1" name=""/>
+        <p:cNvGrpSpPr/>
+        <p:nvPr/>
+      </p:nvGrpSpPr>
+      <p:grpSpPr>
+        <a:xfrm>
+          <a:off x="0" y="0"/>
+          <a:ext cx="0" cy="0"/>
+          <a:chOff x="0" y="0"/>
+          <a:chExt cx="0" cy="0"/>
+        </a:xfrm>
+      </p:grpSpPr>
+      <p:sp>
+        <p:nvSpPr>
+          <p:cNvPr id="2" name="Slide Image Placeholder 1"/>
+          <p:cNvSpPr>
+            <a:spLocks noGrp="1" noRot="1" noChangeAspect="1"/>
+          </p:cNvSpPr>
+          <p:nvPr>
+            <p:ph type="sldImg"/>
+          </p:nvPr>
+        </p:nvSpPr>
+        <p:spPr/>
+      </p:sp>
+      <p:sp>
+        <p:nvSpPr>
+          <p:cNvPr id="3" name="Notes Placeholder 2"/>
+          <p:cNvSpPr>
+            <a:spLocks noGrp="1"/>
+          </p:cNvSpPr>
+          <p:nvPr>
+            <p:ph type="body" idx="1"/>
+          </p:nvPr>
+        </p:nvSpPr>
+        <p:spPr/>
+        <p:txBody>
+          <a:bodyPr/>
+          <a:lstStyle/>
+          <a:p>
+            <a:r>
+              <a:rPr lang="en-US" dirty="0"/>
+              <a:t/>
+            </a:r>
+            <a:endParaRPr lang="en-US" dirty="0"/>
+          </a:p>
+        </p:txBody>
+      </p:sp>
+      <p:sp>
+        <p:nvSpPr>
+          <p:cNvPr id="4" name="Slide Number Placeholder 3"/>
+          <p:cNvSpPr>
+            <a:spLocks noGrp="1"/>
+          </p:cNvSpPr>
+          <p:nvPr>
+            <p:ph type="sldNum" sz="quarter" idx="10"/>
+          </p:nvPr>
+        </p:nvSpPr>
+        <p:spPr/>
+        <p:txBody>
+          <a:bodyPr/>
+          <a:lstStyle/>
+          <a:p>
+            <a:fld id="{F7021451-1387-4CA6-816F-3879F97B5CBC}" type="slidenum">
+              <a:rPr lang="en-US"/>
+              <a:t>13</a:t>
             </a:fld>
             <a:endParaRPr lang="en-US"/>
           </a:p>
@@ -2098,7 +2187,7 @@
                 <a:ea typeface="나눔고딕" pitchFamily="34" charset="-122"/>
                 <a:cs typeface="나눔고딕" pitchFamily="34" charset="-120"/>
               </a:rPr>
-              <a:t>값 기반 마스크 생성</a:t>
+              <a:t>윤곽선 그리기와 컬러 오버레이</a:t>
             </a:r>
             <a:endParaRPr lang="en-US" sz="2800" dirty="0"/>
           </a:p>
@@ -2151,8 +2240,8 @@
         </p:nvSpPr>
         <p:spPr>
           <a:xfrm>
-            <a:off x="457200" y="1051560"/>
-            <a:ext cx="3931920" cy="1280160"/>
+            <a:off x="457200" y="1024128"/>
+            <a:ext cx="8229600" cy="548640"/>
           </a:xfrm>
           <a:prstGeom prst="rect">
             <a:avLst/>
@@ -2179,7 +2268,7 @@
                 <a:ea typeface="나눔고딕" pitchFamily="34" charset="-122"/>
                 <a:cs typeface="나눔고딕" pitchFamily="34" charset="-120"/>
               </a:rPr>
-              <a:t>특정 밝기 구간(또는 컬러 범위)에 해당하는 픽셀만 골라 마스크를 만듭니다. 원하는 층만 분리하는 방법입니다.</a:t>
+              <a:t>findContours 로 찾은 윤곽선을 drawContours 로 그립니다. 검출은 이진 이미지에서, 표시는 원본 그레이스케일 위에 합니다.</a:t>
             </a:r>
             <a:endParaRPr lang="en-US" sz="1400" dirty="0"/>
           </a:p>
@@ -2187,18 +2276,94 @@
       </p:sp>
       <p:sp>
         <p:nvSpPr>
-          <p:cNvPr id="5" name="Shape 3"/>
-          <p:cNvSpPr/>
-          <p:nvPr/>
-        </p:nvSpPr>
-        <p:spPr>
-          <a:xfrm>
-            <a:off x="457200" y="2377440"/>
-            <a:ext cx="3931920" cy="1280160"/>
+          <p:cNvPr id="5" name="Text 3"/>
+          <p:cNvSpPr/>
+          <p:nvPr/>
+        </p:nvSpPr>
+        <p:spPr>
+          <a:xfrm>
+            <a:off x="457200" y="1645920"/>
+            <a:ext cx="4023360" cy="1051560"/>
+          </a:xfrm>
+          <a:prstGeom prst="rect">
+            <a:avLst/>
+          </a:prstGeom>
+          <a:noFill/>
+          <a:ln/>
+        </p:spPr>
+        <p:txBody>
+          <a:bodyPr wrap="square" rtlCol="0" anchor="t"/>
+          <a:lstStyle/>
+          <a:p>
+            <a:pPr indent="0" marL="0">
+              <a:lnSpc>
+                <a:spcPts val="2000"/>
+              </a:lnSpc>
+              <a:buNone/>
+            </a:pPr>
+            <a:r>
+              <a:rPr lang="en-US" sz="1300" dirty="0">
+                <a:solidFill>
+                  <a:srgbClr val="1E293B"/>
+                </a:solidFill>
+                <a:latin typeface="나눔고딕" pitchFamily="34" charset="0"/>
+                <a:ea typeface="나눔고딕" pitchFamily="34" charset="-122"/>
+                <a:cs typeface="나눔고딕" pitchFamily="34" charset="-120"/>
+              </a:rPr>
+              <a:t>핵심: 그레이스케일은 1채널이라 색이 표현되지 않습니다. </a:t>
+            </a:r>
+            <a:pPr indent="0" marL="0">
+              <a:lnSpc>
+                <a:spcPts val="2000"/>
+              </a:lnSpc>
+              <a:buNone/>
+            </a:pPr>
+            <a:r>
+              <a:rPr lang="en-US" sz="1300" b="1" dirty="0">
+                <a:solidFill>
+                  <a:srgbClr val="1E293B"/>
+                </a:solidFill>
+                <a:latin typeface="나눔고딕" pitchFamily="34" charset="0"/>
+                <a:ea typeface="나눔고딕" pitchFamily="34" charset="-122"/>
+                <a:cs typeface="나눔고딕" pitchFamily="34" charset="-120"/>
+              </a:rPr>
+              <a:t>cv2.cvtColor(gray, COLOR_GRAY2BGR)</a:t>
+            </a:r>
+            <a:pPr indent="0" marL="0">
+              <a:lnSpc>
+                <a:spcPts val="2000"/>
+              </a:lnSpc>
+              <a:buNone/>
+            </a:pPr>
+            <a:r>
+              <a:rPr lang="en-US" sz="1300" dirty="0">
+                <a:solidFill>
+                  <a:srgbClr val="1E293B"/>
+                </a:solidFill>
+                <a:latin typeface="나눔고딕" pitchFamily="34" charset="0"/>
+                <a:ea typeface="나눔고딕" pitchFamily="34" charset="-122"/>
+                <a:cs typeface="나눔고딕" pitchFamily="34" charset="-120"/>
+              </a:rPr>
+              <a:t> 로 3채널로 바꾼 뒤 컬러 윤곽선을 얹습니다.</a:t>
+            </a:r>
+            <a:endParaRPr lang="en-US" sz="1300" dirty="0"/>
+          </a:p>
+        </p:txBody>
+      </p:sp>
+      <p:sp>
+        <p:nvSpPr>
+          <p:cNvPr id="6" name="Shape 4"/>
+          <p:cNvSpPr/>
+          <p:nvPr/>
+        </p:nvSpPr>
+        <p:spPr>
+          <a:xfrm>
+            <a:off x="457200" y="2743200"/>
+            <a:ext cx="4023360" cy="1645920"/>
           </a:xfrm>
           <a:prstGeom prst="roundRect">
             <a:avLst>
-              <a:gd name="adj" fmla="val 3571"/>
+              <a:gd name="adj" fmla="val 2778"/>
             </a:avLst>
           </a:prstGeom>
           <a:solidFill>
@@ -2214,14 +2379,14 @@
       </p:sp>
       <p:sp>
         <p:nvSpPr>
-          <p:cNvPr id="6" name="Text 4"/>
-          <p:cNvSpPr/>
-          <p:nvPr/>
-        </p:nvSpPr>
-        <p:spPr>
-          <a:xfrm>
-            <a:off x="594360" y="2468880"/>
-            <a:ext cx="3657600" cy="1097280"/>
+          <p:cNvPr id="7" name="Text 5"/>
+          <p:cNvSpPr/>
+          <p:nvPr/>
+        </p:nvSpPr>
+        <p:spPr>
+          <a:xfrm>
+            <a:off x="594360" y="2834640"/>
+            <a:ext cx="3749040" cy="1463040"/>
           </a:xfrm>
           <a:prstGeom prst="rect">
             <a:avLst/>
@@ -2248,7 +2413,7 @@
                 <a:ea typeface="Courier New" pitchFamily="34" charset="-122"/>
                 <a:cs typeface="Courier New" pitchFamily="34" charset="-120"/>
               </a:rPr>
-              <a:t># 밝기 140~255 인 픽셀만 선택</a:t>
+              <a:t># 1채널 그레이 -&gt; 3채널(BGR) 변환이 필수</a:t>
             </a:r>
             <a:endParaRPr lang="en-US" sz="1150" dirty="0"/>
           </a:p>
@@ -2268,7 +2433,7 @@
                 <a:ea typeface="Courier New" pitchFamily="34" charset="-122"/>
                 <a:cs typeface="Courier New" pitchFamily="34" charset="-120"/>
               </a:rPr>
-              <a:t>mask = cv2.inRange(</a:t>
+              <a:t>vis = cv2.cvtColor(gray, cv2.COLOR_GRAY2BGR)</a:t>
             </a:r>
             <a:endParaRPr lang="en-US" sz="1150" dirty="0"/>
           </a:p>
@@ -2279,17 +2444,6 @@
               </a:lnSpc>
               <a:buNone/>
             </a:pPr>
-            <a:r>
-              <a:rPr lang="en-US" sz="1150" dirty="0">
-                <a:solidFill>
-                  <a:srgbClr val="1E293B"/>
-                </a:solidFill>
-                <a:latin typeface="Courier New" pitchFamily="34" charset="0"/>
-                <a:ea typeface="Courier New" pitchFamily="34" charset="-122"/>
-                <a:cs typeface="Courier New" pitchFamily="34" charset="-120"/>
-              </a:rPr>
-              <a:t>    img, 140, 255)</a:t>
-            </a:r>
             <a:endParaRPr lang="en-US" sz="1150" dirty="0"/>
           </a:p>
           <a:p>
@@ -2308,22 +2462,42 @@
                 <a:ea typeface="Courier New" pitchFamily="34" charset="-122"/>
                 <a:cs typeface="Courier New" pitchFamily="34" charset="-120"/>
               </a:rPr>
-              <a:t># 컬러는 (B,G,R) 하한·상한</a:t>
+              <a:t>cv2.drawContours(vis, cnts, -1, (136,148,13), 2)</a:t>
             </a:r>
             <a:endParaRPr lang="en-US" sz="1150" dirty="0"/>
           </a:p>
-        </p:txBody>
-      </p:sp>
-      <p:sp>
-        <p:nvSpPr>
-          <p:cNvPr id="7" name="Text 5"/>
-          <p:cNvSpPr/>
-          <p:nvPr/>
-        </p:nvSpPr>
-        <p:spPr>
-          <a:xfrm>
-            <a:off x="4709160" y="1554480"/>
-            <a:ext cx="1874520" cy="256032"/>
+          <a:p>
+            <a:pPr algn="l" indent="0" marL="0">
+              <a:lnSpc>
+                <a:spcPts val="1600"/>
+              </a:lnSpc>
+              <a:buNone/>
+            </a:pPr>
+            <a:r>
+              <a:rPr lang="en-US" sz="1150" dirty="0">
+                <a:solidFill>
+                  <a:srgbClr val="1E293B"/>
+                </a:solidFill>
+                <a:latin typeface="Courier New" pitchFamily="34" charset="0"/>
+                <a:ea typeface="Courier New" pitchFamily="34" charset="-122"/>
+                <a:cs typeface="Courier New" pitchFamily="34" charset="-120"/>
+              </a:rPr>
+              <a:t>cv2.drawContours(vis, [big], -1, (60,60,220), 2)</a:t>
+            </a:r>
+            <a:endParaRPr lang="en-US" sz="1150" dirty="0"/>
+          </a:p>
+        </p:txBody>
+      </p:sp>
+      <p:sp>
+        <p:nvSpPr>
+          <p:cNvPr id="8" name="Text 6"/>
+          <p:cNvSpPr/>
+          <p:nvPr/>
+        </p:nvSpPr>
+        <p:spPr>
+          <a:xfrm>
+            <a:off x="4800600" y="1691640"/>
+            <a:ext cx="3703320" cy="256032"/>
           </a:xfrm>
           <a:prstGeom prst="rect">
             <a:avLst/>
@@ -2347,7 +2521,7 @@
                 <a:ea typeface="나눔고딕" pitchFamily="34" charset="-122"/>
                 <a:cs typeface="나눔고딕" pitchFamily="34" charset="-120"/>
               </a:rPr>
-              <a:t>원본</a:t>
+              <a:t>그레이스케일 위에 컬러 윤곽선</a:t>
             </a:r>
             <a:endParaRPr lang="en-US" sz="1100" dirty="0"/>
           </a:p>
@@ -2355,7 +2529,7 @@
       </p:sp>
       <p:pic>
         <p:nvPicPr>
-          <p:cNvPr id="8" name="Image 0" descr="/home/claude/p5img/original.png">    </p:cNvPr>
+          <p:cNvPr id="9" name="Image 0" descr="/home/claude/p5img/contour_overlay.png">    </p:cNvPr>
           <p:cNvPicPr>
             <a:picLocks noChangeAspect="1"/>
           </p:cNvPicPr>
@@ -2369,8 +2543,8 @@
         </p:blipFill>
         <p:spPr>
           <a:xfrm>
-            <a:off x="4709160" y="1828800"/>
-            <a:ext cx="1874520" cy="1249680"/>
+            <a:off x="4800600" y="1965960"/>
+            <a:ext cx="3703320" cy="2468880"/>
           </a:xfrm>
           <a:prstGeom prst="rect">
             <a:avLst/>
@@ -2379,14 +2553,14 @@
       </p:pic>
       <p:sp>
         <p:nvSpPr>
-          <p:cNvPr id="9" name="Shape 6"/>
-          <p:cNvSpPr/>
-          <p:nvPr/>
-        </p:nvSpPr>
-        <p:spPr>
-          <a:xfrm>
-            <a:off x="4709160" y="1828800"/>
-            <a:ext cx="1874520" cy="1249680"/>
+          <p:cNvPr id="10" name="Shape 7"/>
+          <p:cNvSpPr/>
+          <p:nvPr/>
+        </p:nvSpPr>
+        <p:spPr>
+          <a:xfrm>
+            <a:off x="4800600" y="1965960"/>
+            <a:ext cx="3703320" cy="2468880"/>
           </a:xfrm>
           <a:prstGeom prst="rect">
             <a:avLst/>
@@ -2401,88 +2575,42 @@
       </p:sp>
       <p:sp>
         <p:nvSpPr>
-          <p:cNvPr id="10" name="Text 7"/>
-          <p:cNvSpPr/>
-          <p:nvPr/>
-        </p:nvSpPr>
-        <p:spPr>
-          <a:xfrm>
-            <a:off x="6720840" y="1554480"/>
-            <a:ext cx="1874520" cy="256032"/>
-          </a:xfrm>
-          <a:prstGeom prst="rect">
-            <a:avLst/>
-          </a:prstGeom>
-          <a:noFill/>
-          <a:ln/>
-        </p:spPr>
-        <p:txBody>
-          <a:bodyPr wrap="square" lIns="0" tIns="0" rIns="0" bIns="0" rtlCol="0" anchor="ctr"/>
+          <p:cNvPr id="11" name="Text 8"/>
+          <p:cNvSpPr/>
+          <p:nvPr/>
+        </p:nvSpPr>
+        <p:spPr>
+          <a:xfrm>
+            <a:off x="4800600" y="4526280"/>
+            <a:ext cx="3703320" cy="457200"/>
+          </a:xfrm>
+          <a:prstGeom prst="rect">
+            <a:avLst/>
+          </a:prstGeom>
+          <a:noFill/>
+          <a:ln/>
+        </p:spPr>
+        <p:txBody>
+          <a:bodyPr wrap="square" rtlCol="0" anchor="t"/>
           <a:lstStyle/>
           <a:p>
             <a:pPr algn="ctr" indent="0" marL="0">
               <a:buNone/>
             </a:pPr>
             <a:r>
-              <a:rPr lang="en-US" sz="1100" b="1" dirty="0">
-                <a:solidFill>
-                  <a:srgbClr val="0B6B61"/>
+              <a:rPr lang="en-US" sz="1050" i="1" dirty="0">
+                <a:solidFill>
+                  <a:srgbClr val="64748B"/>
                 </a:solidFill>
                 <a:latin typeface="나눔고딕" pitchFamily="34" charset="0"/>
                 <a:ea typeface="나눔고딕" pitchFamily="34" charset="-122"/>
                 <a:cs typeface="나눔고딕" pitchFamily="34" charset="-120"/>
               </a:rPr>
-              <a:t>밝은 층 마스크</a:t>
-            </a:r>
-            <a:endParaRPr lang="en-US" sz="1100" dirty="0"/>
-          </a:p>
-        </p:txBody>
-      </p:sp>
-      <p:pic>
-        <p:nvPicPr>
-          <p:cNvPr id="11" name="Image 1" descr="/home/claude/p5img/mask_range.png">    </p:cNvPr>
-          <p:cNvPicPr>
-            <a:picLocks noChangeAspect="1"/>
-          </p:cNvPicPr>
-          <p:nvPr/>
-        </p:nvPicPr>
-        <p:blipFill>
-          <a:blip r:embed="rId2"/>
-          <a:stretch>
-            <a:fillRect/>
-          </a:stretch>
-        </p:blipFill>
-        <p:spPr>
-          <a:xfrm>
-            <a:off x="6720840" y="1828800"/>
-            <a:ext cx="1874520" cy="1249680"/>
-          </a:xfrm>
-          <a:prstGeom prst="rect">
-            <a:avLst/>
-          </a:prstGeom>
-        </p:spPr>
-      </p:pic>
-      <p:sp>
-        <p:nvSpPr>
-          <p:cNvPr id="12" name="Shape 8"/>
-          <p:cNvSpPr/>
-          <p:nvPr/>
-        </p:nvSpPr>
-        <p:spPr>
-          <a:xfrm>
-            <a:off x="6720840" y="1828800"/>
-            <a:ext cx="1874520" cy="1249680"/>
-          </a:xfrm>
-          <a:prstGeom prst="rect">
-            <a:avLst/>
-          </a:prstGeom>
-          <a:ln w="12700">
-            <a:solidFill>
-              <a:srgbClr val="94A3B8"/>
-            </a:solidFill>
-            <a:prstDash val="solid"/>
-          </a:ln>
-        </p:spPr>
+              <a:t>반투명으로 영역을 채우려면 색을 채운 사본을 만들어 cv2.addWeighted 로 원본과 섞습니다.</a:t>
+            </a:r>
+            <a:endParaRPr lang="en-US" sz="1050" dirty="0"/>
+          </a:p>
+        </p:txBody>
       </p:sp>
     </p:spTree>
   </p:cSld>
@@ -2549,7 +2677,7 @@
                 <a:ea typeface="나눔고딕" pitchFamily="34" charset="-122"/>
                 <a:cs typeface="나눔고딕" pitchFamily="34" charset="-120"/>
               </a:rPr>
-              <a:t>전형적인 전처리 흐름</a:t>
+              <a:t>값 기반 마스크 생성</a:t>
             </a:r>
             <a:endParaRPr lang="en-US" sz="2800" dirty="0"/>
           </a:p>
@@ -2603,7 +2731,7 @@
         <p:spPr>
           <a:xfrm>
             <a:off x="457200" y="1051560"/>
-            <a:ext cx="8229600" cy="457200"/>
+            <a:ext cx="3931920" cy="1280160"/>
           </a:xfrm>
           <a:prstGeom prst="rect">
             <a:avLst/>
@@ -2616,6 +2744,9 @@
           <a:lstStyle/>
           <a:p>
             <a:pPr indent="0" marL="0">
+              <a:lnSpc>
+                <a:spcPts val="2200"/>
+              </a:lnSpc>
               <a:buNone/>
             </a:pPr>
             <a:r>
@@ -2627,15 +2758,183 @@
                 <a:ea typeface="나눔고딕" pitchFamily="34" charset="-122"/>
                 <a:cs typeface="나눔고딕" pitchFamily="34" charset="-120"/>
               </a:rPr>
-              <a:t>실제 계측에서는 이 기법들을 순서대로 연결해 "원본 → 깨끗한 이진/윤곽선"을 만듭니다.</a:t>
+              <a:t>특정 밝기 구간(또는 컬러 범위)에 해당하는 픽셀만 골라 마스크를 만듭니다. 원하는 층만 분리하는 방법입니다.</a:t>
             </a:r>
             <a:endParaRPr lang="en-US" sz="1400" dirty="0"/>
+          </a:p>
+        </p:txBody>
+      </p:sp>
+      <p:sp>
+        <p:nvSpPr>
+          <p:cNvPr id="5" name="Shape 3"/>
+          <p:cNvSpPr/>
+          <p:nvPr/>
+        </p:nvSpPr>
+        <p:spPr>
+          <a:xfrm>
+            <a:off x="457200" y="2377440"/>
+            <a:ext cx="3931920" cy="1280160"/>
+          </a:xfrm>
+          <a:prstGeom prst="roundRect">
+            <a:avLst>
+              <a:gd name="adj" fmla="val 3571"/>
+            </a:avLst>
+          </a:prstGeom>
+          <a:solidFill>
+            <a:srgbClr val="F1F5F9"/>
+          </a:solidFill>
+          <a:ln w="12700">
+            <a:solidFill>
+              <a:srgbClr val="E2E8F0"/>
+            </a:solidFill>
+            <a:prstDash val="solid"/>
+          </a:ln>
+        </p:spPr>
+      </p:sp>
+      <p:sp>
+        <p:nvSpPr>
+          <p:cNvPr id="6" name="Text 4"/>
+          <p:cNvSpPr/>
+          <p:nvPr/>
+        </p:nvSpPr>
+        <p:spPr>
+          <a:xfrm>
+            <a:off x="594360" y="2468880"/>
+            <a:ext cx="3657600" cy="1097280"/>
+          </a:xfrm>
+          <a:prstGeom prst="rect">
+            <a:avLst/>
+          </a:prstGeom>
+          <a:noFill/>
+          <a:ln/>
+        </p:spPr>
+        <p:txBody>
+          <a:bodyPr wrap="square" lIns="0" tIns="0" rIns="0" bIns="0" rtlCol="0" anchor="t"/>
+          <a:lstStyle/>
+          <a:p>
+            <a:pPr algn="l" indent="0" marL="0">
+              <a:lnSpc>
+                <a:spcPts val="1600"/>
+              </a:lnSpc>
+              <a:buNone/>
+            </a:pPr>
+            <a:r>
+              <a:rPr lang="en-US" sz="1150" dirty="0">
+                <a:solidFill>
+                  <a:srgbClr val="1E293B"/>
+                </a:solidFill>
+                <a:latin typeface="Courier New" pitchFamily="34" charset="0"/>
+                <a:ea typeface="Courier New" pitchFamily="34" charset="-122"/>
+                <a:cs typeface="Courier New" pitchFamily="34" charset="-120"/>
+              </a:rPr>
+              <a:t># 밝기 140~255 인 픽셀만 선택</a:t>
+            </a:r>
+            <a:endParaRPr lang="en-US" sz="1150" dirty="0"/>
+          </a:p>
+          <a:p>
+            <a:pPr algn="l" indent="0" marL="0">
+              <a:lnSpc>
+                <a:spcPts val="1600"/>
+              </a:lnSpc>
+              <a:buNone/>
+            </a:pPr>
+            <a:r>
+              <a:rPr lang="en-US" sz="1150" dirty="0">
+                <a:solidFill>
+                  <a:srgbClr val="1E293B"/>
+                </a:solidFill>
+                <a:latin typeface="Courier New" pitchFamily="34" charset="0"/>
+                <a:ea typeface="Courier New" pitchFamily="34" charset="-122"/>
+                <a:cs typeface="Courier New" pitchFamily="34" charset="-120"/>
+              </a:rPr>
+              <a:t>mask = cv2.inRange(</a:t>
+            </a:r>
+            <a:endParaRPr lang="en-US" sz="1150" dirty="0"/>
+          </a:p>
+          <a:p>
+            <a:pPr algn="l" indent="0" marL="0">
+              <a:lnSpc>
+                <a:spcPts val="1600"/>
+              </a:lnSpc>
+              <a:buNone/>
+            </a:pPr>
+            <a:r>
+              <a:rPr lang="en-US" sz="1150" dirty="0">
+                <a:solidFill>
+                  <a:srgbClr val="1E293B"/>
+                </a:solidFill>
+                <a:latin typeface="Courier New" pitchFamily="34" charset="0"/>
+                <a:ea typeface="Courier New" pitchFamily="34" charset="-122"/>
+                <a:cs typeface="Courier New" pitchFamily="34" charset="-120"/>
+              </a:rPr>
+              <a:t>    img, 140, 255)</a:t>
+            </a:r>
+            <a:endParaRPr lang="en-US" sz="1150" dirty="0"/>
+          </a:p>
+          <a:p>
+            <a:pPr algn="l" indent="0" marL="0">
+              <a:lnSpc>
+                <a:spcPts val="1600"/>
+              </a:lnSpc>
+              <a:buNone/>
+            </a:pPr>
+            <a:r>
+              <a:rPr lang="en-US" sz="1150" dirty="0">
+                <a:solidFill>
+                  <a:srgbClr val="1E293B"/>
+                </a:solidFill>
+                <a:latin typeface="Courier New" pitchFamily="34" charset="0"/>
+                <a:ea typeface="Courier New" pitchFamily="34" charset="-122"/>
+                <a:cs typeface="Courier New" pitchFamily="34" charset="-120"/>
+              </a:rPr>
+              <a:t># 컬러는 (B,G,R) 하한·상한</a:t>
+            </a:r>
+            <a:endParaRPr lang="en-US" sz="1150" dirty="0"/>
+          </a:p>
+        </p:txBody>
+      </p:sp>
+      <p:sp>
+        <p:nvSpPr>
+          <p:cNvPr id="7" name="Text 5"/>
+          <p:cNvSpPr/>
+          <p:nvPr/>
+        </p:nvSpPr>
+        <p:spPr>
+          <a:xfrm>
+            <a:off x="4709160" y="1554480"/>
+            <a:ext cx="1874520" cy="256032"/>
+          </a:xfrm>
+          <a:prstGeom prst="rect">
+            <a:avLst/>
+          </a:prstGeom>
+          <a:noFill/>
+          <a:ln/>
+        </p:spPr>
+        <p:txBody>
+          <a:bodyPr wrap="square" lIns="0" tIns="0" rIns="0" bIns="0" rtlCol="0" anchor="ctr"/>
+          <a:lstStyle/>
+          <a:p>
+            <a:pPr algn="ctr" indent="0" marL="0">
+              <a:buNone/>
+            </a:pPr>
+            <a:r>
+              <a:rPr lang="en-US" sz="1100" b="1" dirty="0">
+                <a:solidFill>
+                  <a:srgbClr val="0B6B61"/>
+                </a:solidFill>
+                <a:latin typeface="나눔고딕" pitchFamily="34" charset="0"/>
+                <a:ea typeface="나눔고딕" pitchFamily="34" charset="-122"/>
+                <a:cs typeface="나눔고딕" pitchFamily="34" charset="-120"/>
+              </a:rPr>
+              <a:t>원본</a:t>
+            </a:r>
+            <a:endParaRPr lang="en-US" sz="1100" dirty="0"/>
           </a:p>
         </p:txBody>
       </p:sp>
       <p:pic>
         <p:nvPicPr>
-          <p:cNvPr id="5" name="Image 0" descr="/home/claude/p5img/original.png">    </p:cNvPr>
+          <p:cNvPr id="8" name="Image 0" descr="/home/claude/p5img/original.png">    </p:cNvPr>
           <p:cNvPicPr>
             <a:picLocks noChangeAspect="1"/>
           </p:cNvPicPr>
@@ -2649,8 +2948,8 @@
         </p:blipFill>
         <p:spPr>
           <a:xfrm>
-            <a:off x="411480" y="2331720"/>
-            <a:ext cx="1463040" cy="975360"/>
+            <a:off x="4709160" y="1828800"/>
+            <a:ext cx="1874520" cy="1249680"/>
           </a:xfrm>
           <a:prstGeom prst="rect">
             <a:avLst/>
@@ -2659,14 +2958,14 @@
       </p:pic>
       <p:sp>
         <p:nvSpPr>
-          <p:cNvPr id="6" name="Shape 3"/>
-          <p:cNvSpPr/>
-          <p:nvPr/>
-        </p:nvSpPr>
-        <p:spPr>
-          <a:xfrm>
-            <a:off x="411480" y="2331720"/>
-            <a:ext cx="1463040" cy="975360"/>
+          <p:cNvPr id="9" name="Shape 6"/>
+          <p:cNvSpPr/>
+          <p:nvPr/>
+        </p:nvSpPr>
+        <p:spPr>
+          <a:xfrm>
+            <a:off x="4709160" y="1828800"/>
+            <a:ext cx="1874520" cy="1249680"/>
           </a:xfrm>
           <a:prstGeom prst="rect">
             <a:avLst/>
@@ -2681,14 +2980,14 @@
       </p:sp>
       <p:sp>
         <p:nvSpPr>
-          <p:cNvPr id="7" name="Text 4"/>
-          <p:cNvSpPr/>
-          <p:nvPr/>
-        </p:nvSpPr>
-        <p:spPr>
-          <a:xfrm>
-            <a:off x="411480" y="3352800"/>
-            <a:ext cx="1463040" cy="274320"/>
+          <p:cNvPr id="10" name="Text 7"/>
+          <p:cNvSpPr/>
+          <p:nvPr/>
+        </p:nvSpPr>
+        <p:spPr>
+          <a:xfrm>
+            <a:off x="6720840" y="1554480"/>
+            <a:ext cx="1874520" cy="256032"/>
           </a:xfrm>
           <a:prstGeom prst="rect">
             <a:avLst/>
@@ -2712,39 +3011,15 @@
                 <a:ea typeface="나눔고딕" pitchFamily="34" charset="-122"/>
                 <a:cs typeface="나눔고딕" pitchFamily="34" charset="-120"/>
               </a:rPr>
-              <a:t>원본</a:t>
+              <a:t>밝은 층 마스크</a:t>
             </a:r>
             <a:endParaRPr lang="en-US" sz="1100" dirty="0"/>
           </a:p>
         </p:txBody>
-      </p:sp>
-      <p:sp>
-        <p:nvSpPr>
-          <p:cNvPr id="8" name="Shape 5"/>
-          <p:cNvSpPr/>
-          <p:nvPr/>
-        </p:nvSpPr>
-        <p:spPr>
-          <a:xfrm>
-            <a:off x="1892808" y="2819400"/>
-            <a:ext cx="237744" cy="0"/>
-          </a:xfrm>
-          <a:prstGeom prst="line">
-            <a:avLst/>
-          </a:prstGeom>
-          <a:noFill/>
-          <a:ln w="25400">
-            <a:solidFill>
-              <a:srgbClr val="0D9488"/>
-            </a:solidFill>
-            <a:prstDash val="solid"/>
-            <a:tailEnd type="triangle"/>
-          </a:ln>
-        </p:spPr>
       </p:sp>
       <p:pic>
         <p:nvPicPr>
-          <p:cNvPr id="9" name="Image 1" descr="/home/claude/p5img/gaussian.png">    </p:cNvPr>
+          <p:cNvPr id="11" name="Image 1" descr="/home/claude/p5img/mask_range.png">    </p:cNvPr>
           <p:cNvPicPr>
             <a:picLocks noChangeAspect="1"/>
           </p:cNvPicPr>
@@ -2758,8 +3033,8 @@
         </p:blipFill>
         <p:spPr>
           <a:xfrm>
-            <a:off x="2130552" y="2331720"/>
-            <a:ext cx="1463040" cy="975360"/>
+            <a:off x="6720840" y="1828800"/>
+            <a:ext cx="1874520" cy="1249680"/>
           </a:xfrm>
           <a:prstGeom prst="rect">
             <a:avLst/>
@@ -2768,14 +3043,14 @@
       </p:pic>
       <p:sp>
         <p:nvSpPr>
-          <p:cNvPr id="10" name="Shape 6"/>
-          <p:cNvSpPr/>
-          <p:nvPr/>
-        </p:nvSpPr>
-        <p:spPr>
-          <a:xfrm>
-            <a:off x="2130552" y="2331720"/>
-            <a:ext cx="1463040" cy="975360"/>
+          <p:cNvPr id="12" name="Shape 8"/>
+          <p:cNvSpPr/>
+          <p:nvPr/>
+        </p:nvSpPr>
+        <p:spPr>
+          <a:xfrm>
+            <a:off x="6720840" y="1828800"/>
+            <a:ext cx="1874520" cy="1249680"/>
           </a:xfrm>
           <a:prstGeom prst="rect">
             <a:avLst/>
@@ -2787,411 +3062,6 @@
             <a:prstDash val="solid"/>
           </a:ln>
         </p:spPr>
-      </p:sp>
-      <p:sp>
-        <p:nvSpPr>
-          <p:cNvPr id="11" name="Text 7"/>
-          <p:cNvSpPr/>
-          <p:nvPr/>
-        </p:nvSpPr>
-        <p:spPr>
-          <a:xfrm>
-            <a:off x="2130552" y="3352800"/>
-            <a:ext cx="1463040" cy="274320"/>
-          </a:xfrm>
-          <a:prstGeom prst="rect">
-            <a:avLst/>
-          </a:prstGeom>
-          <a:noFill/>
-          <a:ln/>
-        </p:spPr>
-        <p:txBody>
-          <a:bodyPr wrap="square" lIns="0" tIns="0" rIns="0" bIns="0" rtlCol="0" anchor="ctr"/>
-          <a:lstStyle/>
-          <a:p>
-            <a:pPr algn="ctr" indent="0" marL="0">
-              <a:buNone/>
-            </a:pPr>
-            <a:r>
-              <a:rPr lang="en-US" sz="1100" b="1" dirty="0">
-                <a:solidFill>
-                  <a:srgbClr val="0B6B61"/>
-                </a:solidFill>
-                <a:latin typeface="나눔고딕" pitchFamily="34" charset="0"/>
-                <a:ea typeface="나눔고딕" pitchFamily="34" charset="-122"/>
-                <a:cs typeface="나눔고딕" pitchFamily="34" charset="-120"/>
-              </a:rPr>
-              <a:t>노이즈 제거</a:t>
-            </a:r>
-            <a:endParaRPr lang="en-US" sz="1100" dirty="0"/>
-          </a:p>
-        </p:txBody>
-      </p:sp>
-      <p:sp>
-        <p:nvSpPr>
-          <p:cNvPr id="12" name="Shape 8"/>
-          <p:cNvSpPr/>
-          <p:nvPr/>
-        </p:nvSpPr>
-        <p:spPr>
-          <a:xfrm>
-            <a:off x="3611880" y="2819400"/>
-            <a:ext cx="237744" cy="0"/>
-          </a:xfrm>
-          <a:prstGeom prst="line">
-            <a:avLst/>
-          </a:prstGeom>
-          <a:noFill/>
-          <a:ln w="25400">
-            <a:solidFill>
-              <a:srgbClr val="0D9488"/>
-            </a:solidFill>
-            <a:prstDash val="solid"/>
-            <a:tailEnd type="triangle"/>
-          </a:ln>
-        </p:spPr>
-      </p:sp>
-      <p:pic>
-        <p:nvPicPr>
-          <p:cNvPr id="13" name="Image 2" descr="/home/claude/p5img/otsu.png">    </p:cNvPr>
-          <p:cNvPicPr>
-            <a:picLocks noChangeAspect="1"/>
-          </p:cNvPicPr>
-          <p:nvPr/>
-        </p:nvPicPr>
-        <p:blipFill>
-          <a:blip r:embed="rId3"/>
-          <a:stretch>
-            <a:fillRect/>
-          </a:stretch>
-        </p:blipFill>
-        <p:spPr>
-          <a:xfrm>
-            <a:off x="3849624" y="2331720"/>
-            <a:ext cx="1463040" cy="975360"/>
-          </a:xfrm>
-          <a:prstGeom prst="rect">
-            <a:avLst/>
-          </a:prstGeom>
-        </p:spPr>
-      </p:pic>
-      <p:sp>
-        <p:nvSpPr>
-          <p:cNvPr id="14" name="Shape 9"/>
-          <p:cNvSpPr/>
-          <p:nvPr/>
-        </p:nvSpPr>
-        <p:spPr>
-          <a:xfrm>
-            <a:off x="3849624" y="2331720"/>
-            <a:ext cx="1463040" cy="975360"/>
-          </a:xfrm>
-          <a:prstGeom prst="rect">
-            <a:avLst/>
-          </a:prstGeom>
-          <a:ln w="12700">
-            <a:solidFill>
-              <a:srgbClr val="94A3B8"/>
-            </a:solidFill>
-            <a:prstDash val="solid"/>
-          </a:ln>
-        </p:spPr>
-      </p:sp>
-      <p:sp>
-        <p:nvSpPr>
-          <p:cNvPr id="15" name="Text 10"/>
-          <p:cNvSpPr/>
-          <p:nvPr/>
-        </p:nvSpPr>
-        <p:spPr>
-          <a:xfrm>
-            <a:off x="3849624" y="3352800"/>
-            <a:ext cx="1463040" cy="274320"/>
-          </a:xfrm>
-          <a:prstGeom prst="rect">
-            <a:avLst/>
-          </a:prstGeom>
-          <a:noFill/>
-          <a:ln/>
-        </p:spPr>
-        <p:txBody>
-          <a:bodyPr wrap="square" lIns="0" tIns="0" rIns="0" bIns="0" rtlCol="0" anchor="ctr"/>
-          <a:lstStyle/>
-          <a:p>
-            <a:pPr algn="ctr" indent="0" marL="0">
-              <a:buNone/>
-            </a:pPr>
-            <a:r>
-              <a:rPr lang="en-US" sz="1100" b="1" dirty="0">
-                <a:solidFill>
-                  <a:srgbClr val="0B6B61"/>
-                </a:solidFill>
-                <a:latin typeface="나눔고딕" pitchFamily="34" charset="0"/>
-                <a:ea typeface="나눔고딕" pitchFamily="34" charset="-122"/>
-                <a:cs typeface="나눔고딕" pitchFamily="34" charset="-120"/>
-              </a:rPr>
-              <a:t>이진화</a:t>
-            </a:r>
-            <a:endParaRPr lang="en-US" sz="1100" dirty="0"/>
-          </a:p>
-        </p:txBody>
-      </p:sp>
-      <p:sp>
-        <p:nvSpPr>
-          <p:cNvPr id="16" name="Shape 11"/>
-          <p:cNvSpPr/>
-          <p:nvPr/>
-        </p:nvSpPr>
-        <p:spPr>
-          <a:xfrm>
-            <a:off x="5330952" y="2819400"/>
-            <a:ext cx="237744" cy="0"/>
-          </a:xfrm>
-          <a:prstGeom prst="line">
-            <a:avLst/>
-          </a:prstGeom>
-          <a:noFill/>
-          <a:ln w="25400">
-            <a:solidFill>
-              <a:srgbClr val="0D9488"/>
-            </a:solidFill>
-            <a:prstDash val="solid"/>
-            <a:tailEnd type="triangle"/>
-          </a:ln>
-        </p:spPr>
-      </p:sp>
-      <p:pic>
-        <p:nvPicPr>
-          <p:cNvPr id="17" name="Image 3" descr="/home/claude/p5img/opening.png">    </p:cNvPr>
-          <p:cNvPicPr>
-            <a:picLocks noChangeAspect="1"/>
-          </p:cNvPicPr>
-          <p:nvPr/>
-        </p:nvPicPr>
-        <p:blipFill>
-          <a:blip r:embed="rId4"/>
-          <a:stretch>
-            <a:fillRect/>
-          </a:stretch>
-        </p:blipFill>
-        <p:spPr>
-          <a:xfrm>
-            <a:off x="5568696" y="2331720"/>
-            <a:ext cx="1463040" cy="975360"/>
-          </a:xfrm>
-          <a:prstGeom prst="rect">
-            <a:avLst/>
-          </a:prstGeom>
-        </p:spPr>
-      </p:pic>
-      <p:sp>
-        <p:nvSpPr>
-          <p:cNvPr id="18" name="Shape 12"/>
-          <p:cNvSpPr/>
-          <p:nvPr/>
-        </p:nvSpPr>
-        <p:spPr>
-          <a:xfrm>
-            <a:off x="5568696" y="2331720"/>
-            <a:ext cx="1463040" cy="975360"/>
-          </a:xfrm>
-          <a:prstGeom prst="rect">
-            <a:avLst/>
-          </a:prstGeom>
-          <a:ln w="12700">
-            <a:solidFill>
-              <a:srgbClr val="94A3B8"/>
-            </a:solidFill>
-            <a:prstDash val="solid"/>
-          </a:ln>
-        </p:spPr>
-      </p:sp>
-      <p:sp>
-        <p:nvSpPr>
-          <p:cNvPr id="19" name="Text 13"/>
-          <p:cNvSpPr/>
-          <p:nvPr/>
-        </p:nvSpPr>
-        <p:spPr>
-          <a:xfrm>
-            <a:off x="5568696" y="3352800"/>
-            <a:ext cx="1463040" cy="274320"/>
-          </a:xfrm>
-          <a:prstGeom prst="rect">
-            <a:avLst/>
-          </a:prstGeom>
-          <a:noFill/>
-          <a:ln/>
-        </p:spPr>
-        <p:txBody>
-          <a:bodyPr wrap="square" lIns="0" tIns="0" rIns="0" bIns="0" rtlCol="0" anchor="ctr"/>
-          <a:lstStyle/>
-          <a:p>
-            <a:pPr algn="ctr" indent="0" marL="0">
-              <a:buNone/>
-            </a:pPr>
-            <a:r>
-              <a:rPr lang="en-US" sz="1100" b="1" dirty="0">
-                <a:solidFill>
-                  <a:srgbClr val="0B6B61"/>
-                </a:solidFill>
-                <a:latin typeface="나눔고딕" pitchFamily="34" charset="0"/>
-                <a:ea typeface="나눔고딕" pitchFamily="34" charset="-122"/>
-                <a:cs typeface="나눔고딕" pitchFamily="34" charset="-120"/>
-              </a:rPr>
-              <a:t>모폴로지</a:t>
-            </a:r>
-            <a:endParaRPr lang="en-US" sz="1100" dirty="0"/>
-          </a:p>
-        </p:txBody>
-      </p:sp>
-      <p:sp>
-        <p:nvSpPr>
-          <p:cNvPr id="20" name="Shape 14"/>
-          <p:cNvSpPr/>
-          <p:nvPr/>
-        </p:nvSpPr>
-        <p:spPr>
-          <a:xfrm>
-            <a:off x="7050024" y="2819400"/>
-            <a:ext cx="237744" cy="0"/>
-          </a:xfrm>
-          <a:prstGeom prst="line">
-            <a:avLst/>
-          </a:prstGeom>
-          <a:noFill/>
-          <a:ln w="25400">
-            <a:solidFill>
-              <a:srgbClr val="0D9488"/>
-            </a:solidFill>
-            <a:prstDash val="solid"/>
-            <a:tailEnd type="triangle"/>
-          </a:ln>
-        </p:spPr>
-      </p:sp>
-      <p:pic>
-        <p:nvPicPr>
-          <p:cNvPr id="21" name="Image 4" descr="/home/claude/p5img/contour.png">    </p:cNvPr>
-          <p:cNvPicPr>
-            <a:picLocks noChangeAspect="1"/>
-          </p:cNvPicPr>
-          <p:nvPr/>
-        </p:nvPicPr>
-        <p:blipFill>
-          <a:blip r:embed="rId5"/>
-          <a:stretch>
-            <a:fillRect/>
-          </a:stretch>
-        </p:blipFill>
-        <p:spPr>
-          <a:xfrm>
-            <a:off x="7287768" y="2331720"/>
-            <a:ext cx="1463040" cy="975360"/>
-          </a:xfrm>
-          <a:prstGeom prst="rect">
-            <a:avLst/>
-          </a:prstGeom>
-        </p:spPr>
-      </p:pic>
-      <p:sp>
-        <p:nvSpPr>
-          <p:cNvPr id="22" name="Shape 15"/>
-          <p:cNvSpPr/>
-          <p:nvPr/>
-        </p:nvSpPr>
-        <p:spPr>
-          <a:xfrm>
-            <a:off x="7287768" y="2331720"/>
-            <a:ext cx="1463040" cy="975360"/>
-          </a:xfrm>
-          <a:prstGeom prst="rect">
-            <a:avLst/>
-          </a:prstGeom>
-          <a:ln w="12700">
-            <a:solidFill>
-              <a:srgbClr val="94A3B8"/>
-            </a:solidFill>
-            <a:prstDash val="solid"/>
-          </a:ln>
-        </p:spPr>
-      </p:sp>
-      <p:sp>
-        <p:nvSpPr>
-          <p:cNvPr id="23" name="Text 16"/>
-          <p:cNvSpPr/>
-          <p:nvPr/>
-        </p:nvSpPr>
-        <p:spPr>
-          <a:xfrm>
-            <a:off x="7287768" y="3352800"/>
-            <a:ext cx="1463040" cy="274320"/>
-          </a:xfrm>
-          <a:prstGeom prst="rect">
-            <a:avLst/>
-          </a:prstGeom>
-          <a:noFill/>
-          <a:ln/>
-        </p:spPr>
-        <p:txBody>
-          <a:bodyPr wrap="square" lIns="0" tIns="0" rIns="0" bIns="0" rtlCol="0" anchor="ctr"/>
-          <a:lstStyle/>
-          <a:p>
-            <a:pPr algn="ctr" indent="0" marL="0">
-              <a:buNone/>
-            </a:pPr>
-            <a:r>
-              <a:rPr lang="en-US" sz="1100" b="1" dirty="0">
-                <a:solidFill>
-                  <a:srgbClr val="0B6B61"/>
-                </a:solidFill>
-                <a:latin typeface="나눔고딕" pitchFamily="34" charset="0"/>
-                <a:ea typeface="나눔고딕" pitchFamily="34" charset="-122"/>
-                <a:cs typeface="나눔고딕" pitchFamily="34" charset="-120"/>
-              </a:rPr>
-              <a:t>윤곽선</a:t>
-            </a:r>
-            <a:endParaRPr lang="en-US" sz="1100" dirty="0"/>
-          </a:p>
-        </p:txBody>
-      </p:sp>
-      <p:sp>
-        <p:nvSpPr>
-          <p:cNvPr id="24" name="Text 17"/>
-          <p:cNvSpPr/>
-          <p:nvPr/>
-        </p:nvSpPr>
-        <p:spPr>
-          <a:xfrm>
-            <a:off x="457200" y="3977640"/>
-            <a:ext cx="8229600" cy="365760"/>
-          </a:xfrm>
-          <a:prstGeom prst="rect">
-            <a:avLst/>
-          </a:prstGeom>
-          <a:noFill/>
-          <a:ln/>
-        </p:spPr>
-        <p:txBody>
-          <a:bodyPr wrap="square" rtlCol="0" anchor="t"/>
-          <a:lstStyle/>
-          <a:p>
-            <a:pPr algn="ctr" indent="0" marL="0">
-              <a:buNone/>
-            </a:pPr>
-            <a:r>
-              <a:rPr lang="en-US" sz="1200" i="1" dirty="0">
-                <a:solidFill>
-                  <a:srgbClr val="64748B"/>
-                </a:solidFill>
-                <a:latin typeface="나눔고딕" pitchFamily="34" charset="0"/>
-                <a:ea typeface="나눔고딕" pitchFamily="34" charset="-122"/>
-                <a:cs typeface="나눔고딕" pitchFamily="34" charset="-120"/>
-              </a:rPr>
-              <a:t>각 단계 결과를 변수로 보존하면(Phase 3) 어디서 틀어졌는지 쉽게 되짚을 수 있습니다.</a:t>
-            </a:r>
-            <a:endParaRPr lang="en-US" sz="1200" dirty="0"/>
-          </a:p>
-        </p:txBody>
       </p:sp>
     </p:spTree>
   </p:cSld>
@@ -3204,6 +3074,715 @@
 <file path=ppt/slides/slide12.xml><?xml version="1.0" encoding="utf-8"?>
 <p:sld xmlns:a="http://schemas.openxmlformats.org/drawingml/2006/main" xmlns:r="http://schemas.openxmlformats.org/officeDocument/2006/relationships" xmlns:p="http://schemas.openxmlformats.org/presentationml/2006/main">
   <p:cSld name="Slide 12">
+    <p:bg>
+      <p:bgPr>
+        <a:solidFill>
+          <a:srgbClr val="FFFFFF"/>
+        </a:solidFill>
+      </p:bgPr>
+    </p:bg>
+    <p:spTree>
+      <p:nvGrpSpPr>
+        <p:cNvPr id="1" name=""/>
+        <p:cNvGrpSpPr/>
+        <p:nvPr/>
+      </p:nvGrpSpPr>
+      <p:grpSpPr>
+        <a:xfrm>
+          <a:off x="0" y="0"/>
+          <a:ext cx="0" cy="0"/>
+          <a:chOff x="0" y="0"/>
+          <a:chExt cx="0" cy="0"/>
+        </a:xfrm>
+      </p:grpSpPr>
+      <p:sp>
+        <p:nvSpPr>
+          <p:cNvPr id="2" name="Text 0"/>
+          <p:cNvSpPr/>
+          <p:nvPr/>
+        </p:nvSpPr>
+        <p:spPr>
+          <a:xfrm>
+            <a:off x="457200" y="365760"/>
+            <a:ext cx="6949440" cy="640080"/>
+          </a:xfrm>
+          <a:prstGeom prst="rect">
+            <a:avLst/>
+          </a:prstGeom>
+          <a:noFill/>
+          <a:ln/>
+        </p:spPr>
+        <p:txBody>
+          <a:bodyPr wrap="square" lIns="0" tIns="0" rIns="0" bIns="0" rtlCol="0" anchor="ctr"/>
+          <a:lstStyle/>
+          <a:p>
+            <a:pPr indent="0" marL="0">
+              <a:buNone/>
+            </a:pPr>
+            <a:r>
+              <a:rPr lang="en-US" sz="2800" b="1" dirty="0">
+                <a:solidFill>
+                  <a:srgbClr val="1E293B"/>
+                </a:solidFill>
+                <a:latin typeface="나눔고딕" pitchFamily="34" charset="0"/>
+                <a:ea typeface="나눔고딕" pitchFamily="34" charset="-122"/>
+                <a:cs typeface="나눔고딕" pitchFamily="34" charset="-120"/>
+              </a:rPr>
+              <a:t>전형적인 전처리 흐름</a:t>
+            </a:r>
+            <a:endParaRPr lang="en-US" sz="2800" dirty="0"/>
+          </a:p>
+        </p:txBody>
+      </p:sp>
+      <p:sp>
+        <p:nvSpPr>
+          <p:cNvPr id="3" name="Text 1"/>
+          <p:cNvSpPr/>
+          <p:nvPr/>
+        </p:nvSpPr>
+        <p:spPr>
+          <a:xfrm>
+            <a:off x="7406640" y="457200"/>
+            <a:ext cx="1280160" cy="365760"/>
+          </a:xfrm>
+          <a:prstGeom prst="rect">
+            <a:avLst/>
+          </a:prstGeom>
+          <a:noFill/>
+          <a:ln/>
+        </p:spPr>
+        <p:txBody>
+          <a:bodyPr wrap="square" rtlCol="0" anchor="ctr"/>
+          <a:lstStyle/>
+          <a:p>
+            <a:pPr algn="r" indent="0" marL="0">
+              <a:buNone/>
+            </a:pPr>
+            <a:r>
+              <a:rPr lang="en-US" sz="1200" b="1" dirty="0">
+                <a:solidFill>
+                  <a:srgbClr val="0D9488"/>
+                </a:solidFill>
+                <a:latin typeface="나눔고딕" pitchFamily="34" charset="0"/>
+                <a:ea typeface="나눔고딕" pitchFamily="34" charset="-122"/>
+                <a:cs typeface="나눔고딕" pitchFamily="34" charset="-120"/>
+              </a:rPr>
+              <a:t>W12–W14</a:t>
+            </a:r>
+            <a:endParaRPr lang="en-US" sz="1200" dirty="0"/>
+          </a:p>
+        </p:txBody>
+      </p:sp>
+      <p:sp>
+        <p:nvSpPr>
+          <p:cNvPr id="4" name="Text 2"/>
+          <p:cNvSpPr/>
+          <p:nvPr/>
+        </p:nvSpPr>
+        <p:spPr>
+          <a:xfrm>
+            <a:off x="457200" y="1051560"/>
+            <a:ext cx="8229600" cy="457200"/>
+          </a:xfrm>
+          <a:prstGeom prst="rect">
+            <a:avLst/>
+          </a:prstGeom>
+          <a:noFill/>
+          <a:ln/>
+        </p:spPr>
+        <p:txBody>
+          <a:bodyPr wrap="square" rtlCol="0" anchor="t"/>
+          <a:lstStyle/>
+          <a:p>
+            <a:pPr indent="0" marL="0">
+              <a:buNone/>
+            </a:pPr>
+            <a:r>
+              <a:rPr lang="en-US" sz="1400" dirty="0">
+                <a:solidFill>
+                  <a:srgbClr val="1E293B"/>
+                </a:solidFill>
+                <a:latin typeface="나눔고딕" pitchFamily="34" charset="0"/>
+                <a:ea typeface="나눔고딕" pitchFamily="34" charset="-122"/>
+                <a:cs typeface="나눔고딕" pitchFamily="34" charset="-120"/>
+              </a:rPr>
+              <a:t>실제 계측에서는 이 기법들을 순서대로 연결해 "원본 → 깨끗한 이진/윤곽선"을 만듭니다.</a:t>
+            </a:r>
+            <a:endParaRPr lang="en-US" sz="1400" dirty="0"/>
+          </a:p>
+        </p:txBody>
+      </p:sp>
+      <p:pic>
+        <p:nvPicPr>
+          <p:cNvPr id="5" name="Image 0" descr="/home/claude/p5img/original.png">    </p:cNvPr>
+          <p:cNvPicPr>
+            <a:picLocks noChangeAspect="1"/>
+          </p:cNvPicPr>
+          <p:nvPr/>
+        </p:nvPicPr>
+        <p:blipFill>
+          <a:blip r:embed="rId1"/>
+          <a:stretch>
+            <a:fillRect/>
+          </a:stretch>
+        </p:blipFill>
+        <p:spPr>
+          <a:xfrm>
+            <a:off x="411480" y="2331720"/>
+            <a:ext cx="1463040" cy="975360"/>
+          </a:xfrm>
+          <a:prstGeom prst="rect">
+            <a:avLst/>
+          </a:prstGeom>
+        </p:spPr>
+      </p:pic>
+      <p:sp>
+        <p:nvSpPr>
+          <p:cNvPr id="6" name="Shape 3"/>
+          <p:cNvSpPr/>
+          <p:nvPr/>
+        </p:nvSpPr>
+        <p:spPr>
+          <a:xfrm>
+            <a:off x="411480" y="2331720"/>
+            <a:ext cx="1463040" cy="975360"/>
+          </a:xfrm>
+          <a:prstGeom prst="rect">
+            <a:avLst/>
+          </a:prstGeom>
+          <a:ln w="12700">
+            <a:solidFill>
+              <a:srgbClr val="94A3B8"/>
+            </a:solidFill>
+            <a:prstDash val="solid"/>
+          </a:ln>
+        </p:spPr>
+      </p:sp>
+      <p:sp>
+        <p:nvSpPr>
+          <p:cNvPr id="7" name="Text 4"/>
+          <p:cNvSpPr/>
+          <p:nvPr/>
+        </p:nvSpPr>
+        <p:spPr>
+          <a:xfrm>
+            <a:off x="411480" y="3352800"/>
+            <a:ext cx="1463040" cy="274320"/>
+          </a:xfrm>
+          <a:prstGeom prst="rect">
+            <a:avLst/>
+          </a:prstGeom>
+          <a:noFill/>
+          <a:ln/>
+        </p:spPr>
+        <p:txBody>
+          <a:bodyPr wrap="square" lIns="0" tIns="0" rIns="0" bIns="0" rtlCol="0" anchor="ctr"/>
+          <a:lstStyle/>
+          <a:p>
+            <a:pPr algn="ctr" indent="0" marL="0">
+              <a:buNone/>
+            </a:pPr>
+            <a:r>
+              <a:rPr lang="en-US" sz="1100" b="1" dirty="0">
+                <a:solidFill>
+                  <a:srgbClr val="0B6B61"/>
+                </a:solidFill>
+                <a:latin typeface="나눔고딕" pitchFamily="34" charset="0"/>
+                <a:ea typeface="나눔고딕" pitchFamily="34" charset="-122"/>
+                <a:cs typeface="나눔고딕" pitchFamily="34" charset="-120"/>
+              </a:rPr>
+              <a:t>원본</a:t>
+            </a:r>
+            <a:endParaRPr lang="en-US" sz="1100" dirty="0"/>
+          </a:p>
+        </p:txBody>
+      </p:sp>
+      <p:sp>
+        <p:nvSpPr>
+          <p:cNvPr id="8" name="Shape 5"/>
+          <p:cNvSpPr/>
+          <p:nvPr/>
+        </p:nvSpPr>
+        <p:spPr>
+          <a:xfrm>
+            <a:off x="1892808" y="2819400"/>
+            <a:ext cx="237744" cy="0"/>
+          </a:xfrm>
+          <a:prstGeom prst="line">
+            <a:avLst/>
+          </a:prstGeom>
+          <a:noFill/>
+          <a:ln w="25400">
+            <a:solidFill>
+              <a:srgbClr val="0D9488"/>
+            </a:solidFill>
+            <a:prstDash val="solid"/>
+            <a:tailEnd type="triangle"/>
+          </a:ln>
+        </p:spPr>
+      </p:sp>
+      <p:pic>
+        <p:nvPicPr>
+          <p:cNvPr id="9" name="Image 1" descr="/home/claude/p5img/gaussian.png">    </p:cNvPr>
+          <p:cNvPicPr>
+            <a:picLocks noChangeAspect="1"/>
+          </p:cNvPicPr>
+          <p:nvPr/>
+        </p:nvPicPr>
+        <p:blipFill>
+          <a:blip r:embed="rId2"/>
+          <a:stretch>
+            <a:fillRect/>
+          </a:stretch>
+        </p:blipFill>
+        <p:spPr>
+          <a:xfrm>
+            <a:off x="2130552" y="2331720"/>
+            <a:ext cx="1463040" cy="975360"/>
+          </a:xfrm>
+          <a:prstGeom prst="rect">
+            <a:avLst/>
+          </a:prstGeom>
+        </p:spPr>
+      </p:pic>
+      <p:sp>
+        <p:nvSpPr>
+          <p:cNvPr id="10" name="Shape 6"/>
+          <p:cNvSpPr/>
+          <p:nvPr/>
+        </p:nvSpPr>
+        <p:spPr>
+          <a:xfrm>
+            <a:off x="2130552" y="2331720"/>
+            <a:ext cx="1463040" cy="975360"/>
+          </a:xfrm>
+          <a:prstGeom prst="rect">
+            <a:avLst/>
+          </a:prstGeom>
+          <a:ln w="12700">
+            <a:solidFill>
+              <a:srgbClr val="94A3B8"/>
+            </a:solidFill>
+            <a:prstDash val="solid"/>
+          </a:ln>
+        </p:spPr>
+      </p:sp>
+      <p:sp>
+        <p:nvSpPr>
+          <p:cNvPr id="11" name="Text 7"/>
+          <p:cNvSpPr/>
+          <p:nvPr/>
+        </p:nvSpPr>
+        <p:spPr>
+          <a:xfrm>
+            <a:off x="2130552" y="3352800"/>
+            <a:ext cx="1463040" cy="274320"/>
+          </a:xfrm>
+          <a:prstGeom prst="rect">
+            <a:avLst/>
+          </a:prstGeom>
+          <a:noFill/>
+          <a:ln/>
+        </p:spPr>
+        <p:txBody>
+          <a:bodyPr wrap="square" lIns="0" tIns="0" rIns="0" bIns="0" rtlCol="0" anchor="ctr"/>
+          <a:lstStyle/>
+          <a:p>
+            <a:pPr algn="ctr" indent="0" marL="0">
+              <a:buNone/>
+            </a:pPr>
+            <a:r>
+              <a:rPr lang="en-US" sz="1100" b="1" dirty="0">
+                <a:solidFill>
+                  <a:srgbClr val="0B6B61"/>
+                </a:solidFill>
+                <a:latin typeface="나눔고딕" pitchFamily="34" charset="0"/>
+                <a:ea typeface="나눔고딕" pitchFamily="34" charset="-122"/>
+                <a:cs typeface="나눔고딕" pitchFamily="34" charset="-120"/>
+              </a:rPr>
+              <a:t>노이즈 제거</a:t>
+            </a:r>
+            <a:endParaRPr lang="en-US" sz="1100" dirty="0"/>
+          </a:p>
+        </p:txBody>
+      </p:sp>
+      <p:sp>
+        <p:nvSpPr>
+          <p:cNvPr id="12" name="Shape 8"/>
+          <p:cNvSpPr/>
+          <p:nvPr/>
+        </p:nvSpPr>
+        <p:spPr>
+          <a:xfrm>
+            <a:off x="3611880" y="2819400"/>
+            <a:ext cx="237744" cy="0"/>
+          </a:xfrm>
+          <a:prstGeom prst="line">
+            <a:avLst/>
+          </a:prstGeom>
+          <a:noFill/>
+          <a:ln w="25400">
+            <a:solidFill>
+              <a:srgbClr val="0D9488"/>
+            </a:solidFill>
+            <a:prstDash val="solid"/>
+            <a:tailEnd type="triangle"/>
+          </a:ln>
+        </p:spPr>
+      </p:sp>
+      <p:pic>
+        <p:nvPicPr>
+          <p:cNvPr id="13" name="Image 2" descr="/home/claude/p5img/otsu.png">    </p:cNvPr>
+          <p:cNvPicPr>
+            <a:picLocks noChangeAspect="1"/>
+          </p:cNvPicPr>
+          <p:nvPr/>
+        </p:nvPicPr>
+        <p:blipFill>
+          <a:blip r:embed="rId3"/>
+          <a:stretch>
+            <a:fillRect/>
+          </a:stretch>
+        </p:blipFill>
+        <p:spPr>
+          <a:xfrm>
+            <a:off x="3849624" y="2331720"/>
+            <a:ext cx="1463040" cy="975360"/>
+          </a:xfrm>
+          <a:prstGeom prst="rect">
+            <a:avLst/>
+          </a:prstGeom>
+        </p:spPr>
+      </p:pic>
+      <p:sp>
+        <p:nvSpPr>
+          <p:cNvPr id="14" name="Shape 9"/>
+          <p:cNvSpPr/>
+          <p:nvPr/>
+        </p:nvSpPr>
+        <p:spPr>
+          <a:xfrm>
+            <a:off x="3849624" y="2331720"/>
+            <a:ext cx="1463040" cy="975360"/>
+          </a:xfrm>
+          <a:prstGeom prst="rect">
+            <a:avLst/>
+          </a:prstGeom>
+          <a:ln w="12700">
+            <a:solidFill>
+              <a:srgbClr val="94A3B8"/>
+            </a:solidFill>
+            <a:prstDash val="solid"/>
+          </a:ln>
+        </p:spPr>
+      </p:sp>
+      <p:sp>
+        <p:nvSpPr>
+          <p:cNvPr id="15" name="Text 10"/>
+          <p:cNvSpPr/>
+          <p:nvPr/>
+        </p:nvSpPr>
+        <p:spPr>
+          <a:xfrm>
+            <a:off x="3849624" y="3352800"/>
+            <a:ext cx="1463040" cy="274320"/>
+          </a:xfrm>
+          <a:prstGeom prst="rect">
+            <a:avLst/>
+          </a:prstGeom>
+          <a:noFill/>
+          <a:ln/>
+        </p:spPr>
+        <p:txBody>
+          <a:bodyPr wrap="square" lIns="0" tIns="0" rIns="0" bIns="0" rtlCol="0" anchor="ctr"/>
+          <a:lstStyle/>
+          <a:p>
+            <a:pPr algn="ctr" indent="0" marL="0">
+              <a:buNone/>
+            </a:pPr>
+            <a:r>
+              <a:rPr lang="en-US" sz="1100" b="1" dirty="0">
+                <a:solidFill>
+                  <a:srgbClr val="0B6B61"/>
+                </a:solidFill>
+                <a:latin typeface="나눔고딕" pitchFamily="34" charset="0"/>
+                <a:ea typeface="나눔고딕" pitchFamily="34" charset="-122"/>
+                <a:cs typeface="나눔고딕" pitchFamily="34" charset="-120"/>
+              </a:rPr>
+              <a:t>이진화</a:t>
+            </a:r>
+            <a:endParaRPr lang="en-US" sz="1100" dirty="0"/>
+          </a:p>
+        </p:txBody>
+      </p:sp>
+      <p:sp>
+        <p:nvSpPr>
+          <p:cNvPr id="16" name="Shape 11"/>
+          <p:cNvSpPr/>
+          <p:nvPr/>
+        </p:nvSpPr>
+        <p:spPr>
+          <a:xfrm>
+            <a:off x="5330952" y="2819400"/>
+            <a:ext cx="237744" cy="0"/>
+          </a:xfrm>
+          <a:prstGeom prst="line">
+            <a:avLst/>
+          </a:prstGeom>
+          <a:noFill/>
+          <a:ln w="25400">
+            <a:solidFill>
+              <a:srgbClr val="0D9488"/>
+            </a:solidFill>
+            <a:prstDash val="solid"/>
+            <a:tailEnd type="triangle"/>
+          </a:ln>
+        </p:spPr>
+      </p:sp>
+      <p:pic>
+        <p:nvPicPr>
+          <p:cNvPr id="17" name="Image 3" descr="/home/claude/p5img/opening.png">    </p:cNvPr>
+          <p:cNvPicPr>
+            <a:picLocks noChangeAspect="1"/>
+          </p:cNvPicPr>
+          <p:nvPr/>
+        </p:nvPicPr>
+        <p:blipFill>
+          <a:blip r:embed="rId4"/>
+          <a:stretch>
+            <a:fillRect/>
+          </a:stretch>
+        </p:blipFill>
+        <p:spPr>
+          <a:xfrm>
+            <a:off x="5568696" y="2331720"/>
+            <a:ext cx="1463040" cy="975360"/>
+          </a:xfrm>
+          <a:prstGeom prst="rect">
+            <a:avLst/>
+          </a:prstGeom>
+        </p:spPr>
+      </p:pic>
+      <p:sp>
+        <p:nvSpPr>
+          <p:cNvPr id="18" name="Shape 12"/>
+          <p:cNvSpPr/>
+          <p:nvPr/>
+        </p:nvSpPr>
+        <p:spPr>
+          <a:xfrm>
+            <a:off x="5568696" y="2331720"/>
+            <a:ext cx="1463040" cy="975360"/>
+          </a:xfrm>
+          <a:prstGeom prst="rect">
+            <a:avLst/>
+          </a:prstGeom>
+          <a:ln w="12700">
+            <a:solidFill>
+              <a:srgbClr val="94A3B8"/>
+            </a:solidFill>
+            <a:prstDash val="solid"/>
+          </a:ln>
+        </p:spPr>
+      </p:sp>
+      <p:sp>
+        <p:nvSpPr>
+          <p:cNvPr id="19" name="Text 13"/>
+          <p:cNvSpPr/>
+          <p:nvPr/>
+        </p:nvSpPr>
+        <p:spPr>
+          <a:xfrm>
+            <a:off x="5568696" y="3352800"/>
+            <a:ext cx="1463040" cy="274320"/>
+          </a:xfrm>
+          <a:prstGeom prst="rect">
+            <a:avLst/>
+          </a:prstGeom>
+          <a:noFill/>
+          <a:ln/>
+        </p:spPr>
+        <p:txBody>
+          <a:bodyPr wrap="square" lIns="0" tIns="0" rIns="0" bIns="0" rtlCol="0" anchor="ctr"/>
+          <a:lstStyle/>
+          <a:p>
+            <a:pPr algn="ctr" indent="0" marL="0">
+              <a:buNone/>
+            </a:pPr>
+            <a:r>
+              <a:rPr lang="en-US" sz="1100" b="1" dirty="0">
+                <a:solidFill>
+                  <a:srgbClr val="0B6B61"/>
+                </a:solidFill>
+                <a:latin typeface="나눔고딕" pitchFamily="34" charset="0"/>
+                <a:ea typeface="나눔고딕" pitchFamily="34" charset="-122"/>
+                <a:cs typeface="나눔고딕" pitchFamily="34" charset="-120"/>
+              </a:rPr>
+              <a:t>모폴로지</a:t>
+            </a:r>
+            <a:endParaRPr lang="en-US" sz="1100" dirty="0"/>
+          </a:p>
+        </p:txBody>
+      </p:sp>
+      <p:sp>
+        <p:nvSpPr>
+          <p:cNvPr id="20" name="Shape 14"/>
+          <p:cNvSpPr/>
+          <p:nvPr/>
+        </p:nvSpPr>
+        <p:spPr>
+          <a:xfrm>
+            <a:off x="7050024" y="2819400"/>
+            <a:ext cx="237744" cy="0"/>
+          </a:xfrm>
+          <a:prstGeom prst="line">
+            <a:avLst/>
+          </a:prstGeom>
+          <a:noFill/>
+          <a:ln w="25400">
+            <a:solidFill>
+              <a:srgbClr val="0D9488"/>
+            </a:solidFill>
+            <a:prstDash val="solid"/>
+            <a:tailEnd type="triangle"/>
+          </a:ln>
+        </p:spPr>
+      </p:sp>
+      <p:pic>
+        <p:nvPicPr>
+          <p:cNvPr id="21" name="Image 4" descr="/home/claude/p5img/contour.png">    </p:cNvPr>
+          <p:cNvPicPr>
+            <a:picLocks noChangeAspect="1"/>
+          </p:cNvPicPr>
+          <p:nvPr/>
+        </p:nvPicPr>
+        <p:blipFill>
+          <a:blip r:embed="rId5"/>
+          <a:stretch>
+            <a:fillRect/>
+          </a:stretch>
+        </p:blipFill>
+        <p:spPr>
+          <a:xfrm>
+            <a:off x="7287768" y="2331720"/>
+            <a:ext cx="1463040" cy="975360"/>
+          </a:xfrm>
+          <a:prstGeom prst="rect">
+            <a:avLst/>
+          </a:prstGeom>
+        </p:spPr>
+      </p:pic>
+      <p:sp>
+        <p:nvSpPr>
+          <p:cNvPr id="22" name="Shape 15"/>
+          <p:cNvSpPr/>
+          <p:nvPr/>
+        </p:nvSpPr>
+        <p:spPr>
+          <a:xfrm>
+            <a:off x="7287768" y="2331720"/>
+            <a:ext cx="1463040" cy="975360"/>
+          </a:xfrm>
+          <a:prstGeom prst="rect">
+            <a:avLst/>
+          </a:prstGeom>
+          <a:ln w="12700">
+            <a:solidFill>
+              <a:srgbClr val="94A3B8"/>
+            </a:solidFill>
+            <a:prstDash val="solid"/>
+          </a:ln>
+        </p:spPr>
+      </p:sp>
+      <p:sp>
+        <p:nvSpPr>
+          <p:cNvPr id="23" name="Text 16"/>
+          <p:cNvSpPr/>
+          <p:nvPr/>
+        </p:nvSpPr>
+        <p:spPr>
+          <a:xfrm>
+            <a:off x="7287768" y="3352800"/>
+            <a:ext cx="1463040" cy="274320"/>
+          </a:xfrm>
+          <a:prstGeom prst="rect">
+            <a:avLst/>
+          </a:prstGeom>
+          <a:noFill/>
+          <a:ln/>
+        </p:spPr>
+        <p:txBody>
+          <a:bodyPr wrap="square" lIns="0" tIns="0" rIns="0" bIns="0" rtlCol="0" anchor="ctr"/>
+          <a:lstStyle/>
+          <a:p>
+            <a:pPr algn="ctr" indent="0" marL="0">
+              <a:buNone/>
+            </a:pPr>
+            <a:r>
+              <a:rPr lang="en-US" sz="1100" b="1" dirty="0">
+                <a:solidFill>
+                  <a:srgbClr val="0B6B61"/>
+                </a:solidFill>
+                <a:latin typeface="나눔고딕" pitchFamily="34" charset="0"/>
+                <a:ea typeface="나눔고딕" pitchFamily="34" charset="-122"/>
+                <a:cs typeface="나눔고딕" pitchFamily="34" charset="-120"/>
+              </a:rPr>
+              <a:t>윤곽선</a:t>
+            </a:r>
+            <a:endParaRPr lang="en-US" sz="1100" dirty="0"/>
+          </a:p>
+        </p:txBody>
+      </p:sp>
+      <p:sp>
+        <p:nvSpPr>
+          <p:cNvPr id="24" name="Text 17"/>
+          <p:cNvSpPr/>
+          <p:nvPr/>
+        </p:nvSpPr>
+        <p:spPr>
+          <a:xfrm>
+            <a:off x="457200" y="3977640"/>
+            <a:ext cx="8229600" cy="365760"/>
+          </a:xfrm>
+          <a:prstGeom prst="rect">
+            <a:avLst/>
+          </a:prstGeom>
+          <a:noFill/>
+          <a:ln/>
+        </p:spPr>
+        <p:txBody>
+          <a:bodyPr wrap="square" rtlCol="0" anchor="t"/>
+          <a:lstStyle/>
+          <a:p>
+            <a:pPr algn="ctr" indent="0" marL="0">
+              <a:buNone/>
+            </a:pPr>
+            <a:r>
+              <a:rPr lang="en-US" sz="1200" i="1" dirty="0">
+                <a:solidFill>
+                  <a:srgbClr val="64748B"/>
+                </a:solidFill>
+                <a:latin typeface="나눔고딕" pitchFamily="34" charset="0"/>
+                <a:ea typeface="나눔고딕" pitchFamily="34" charset="-122"/>
+                <a:cs typeface="나눔고딕" pitchFamily="34" charset="-120"/>
+              </a:rPr>
+              <a:t>각 단계 결과를 변수로 보존하면(Phase 3) 어디서 틀어졌는지 쉽게 되짚을 수 있습니다.</a:t>
+            </a:r>
+            <a:endParaRPr lang="en-US" sz="1200" dirty="0"/>
+          </a:p>
+        </p:txBody>
+      </p:sp>
+    </p:spTree>
+  </p:cSld>
+  <p:clrMapOvr>
+    <a:masterClrMapping/>
+  </p:clrMapOvr>
+</p:sld>
+</file>
+
+<file path=ppt/slides/slide13.xml><?xml version="1.0" encoding="utf-8"?>
+<p:sld xmlns:a="http://schemas.openxmlformats.org/drawingml/2006/main" xmlns:r="http://schemas.openxmlformats.org/officeDocument/2006/relationships" xmlns:p="http://schemas.openxmlformats.org/presentationml/2006/main">
+  <p:cSld name="Slide 13">
     <p:bg>
       <p:bgPr>
         <a:solidFill>
